--- a/.lessons/21 Fundamental CRUD/11 Deleting A Specific Data/1.pptx
+++ b/.lessons/21 Fundamental CRUD/11 Deleting A Specific Data/1.pptx
@@ -9,6 +9,8 @@
     <p:sldId id="402" r:id="rId3"/>
     <p:sldId id="403" r:id="rId4"/>
     <p:sldId id="400" r:id="rId5"/>
+    <p:sldId id="404" r:id="rId6"/>
+    <p:sldId id="405" r:id="rId7"/>
   </p:sldIdLst>
   <p:sldSz cx="12192000" cy="6858000"/>
   <p:notesSz cx="6858000" cy="9144000"/>
@@ -262,7 +264,7 @@
           <a:p>
             <a:fld id="{3E102D2E-813C-461C-9963-687A650C48C0}" type="datetimeFigureOut">
               <a:rPr lang="en-US" smtClean="0"/>
-              <a:t>4/26/2025</a:t>
+              <a:t>5/21/2025</a:t>
             </a:fld>
             <a:endParaRPr lang="en-US"/>
           </a:p>
@@ -460,7 +462,7 @@
           <a:p>
             <a:fld id="{3E102D2E-813C-461C-9963-687A650C48C0}" type="datetimeFigureOut">
               <a:rPr lang="en-US" smtClean="0"/>
-              <a:t>4/26/2025</a:t>
+              <a:t>5/21/2025</a:t>
             </a:fld>
             <a:endParaRPr lang="en-US"/>
           </a:p>
@@ -668,7 +670,7 @@
           <a:p>
             <a:fld id="{3E102D2E-813C-461C-9963-687A650C48C0}" type="datetimeFigureOut">
               <a:rPr lang="en-US" smtClean="0"/>
-              <a:t>4/26/2025</a:t>
+              <a:t>5/21/2025</a:t>
             </a:fld>
             <a:endParaRPr lang="en-US"/>
           </a:p>
@@ -866,7 +868,7 @@
           <a:p>
             <a:fld id="{3E102D2E-813C-461C-9963-687A650C48C0}" type="datetimeFigureOut">
               <a:rPr lang="en-US" smtClean="0"/>
-              <a:t>4/26/2025</a:t>
+              <a:t>5/21/2025</a:t>
             </a:fld>
             <a:endParaRPr lang="en-US"/>
           </a:p>
@@ -1141,7 +1143,7 @@
           <a:p>
             <a:fld id="{3E102D2E-813C-461C-9963-687A650C48C0}" type="datetimeFigureOut">
               <a:rPr lang="en-US" smtClean="0"/>
-              <a:t>4/26/2025</a:t>
+              <a:t>5/21/2025</a:t>
             </a:fld>
             <a:endParaRPr lang="en-US"/>
           </a:p>
@@ -1406,7 +1408,7 @@
           <a:p>
             <a:fld id="{3E102D2E-813C-461C-9963-687A650C48C0}" type="datetimeFigureOut">
               <a:rPr lang="en-US" smtClean="0"/>
-              <a:t>4/26/2025</a:t>
+              <a:t>5/21/2025</a:t>
             </a:fld>
             <a:endParaRPr lang="en-US"/>
           </a:p>
@@ -1818,7 +1820,7 @@
           <a:p>
             <a:fld id="{3E102D2E-813C-461C-9963-687A650C48C0}" type="datetimeFigureOut">
               <a:rPr lang="en-US" smtClean="0"/>
-              <a:t>4/26/2025</a:t>
+              <a:t>5/21/2025</a:t>
             </a:fld>
             <a:endParaRPr lang="en-US"/>
           </a:p>
@@ -1959,7 +1961,7 @@
           <a:p>
             <a:fld id="{3E102D2E-813C-461C-9963-687A650C48C0}" type="datetimeFigureOut">
               <a:rPr lang="en-US" smtClean="0"/>
-              <a:t>4/26/2025</a:t>
+              <a:t>5/21/2025</a:t>
             </a:fld>
             <a:endParaRPr lang="en-US"/>
           </a:p>
@@ -2072,7 +2074,7 @@
           <a:p>
             <a:fld id="{3E102D2E-813C-461C-9963-687A650C48C0}" type="datetimeFigureOut">
               <a:rPr lang="en-US" smtClean="0"/>
-              <a:t>4/26/2025</a:t>
+              <a:t>5/21/2025</a:t>
             </a:fld>
             <a:endParaRPr lang="en-US"/>
           </a:p>
@@ -2383,7 +2385,7 @@
           <a:p>
             <a:fld id="{3E102D2E-813C-461C-9963-687A650C48C0}" type="datetimeFigureOut">
               <a:rPr lang="en-US" smtClean="0"/>
-              <a:t>4/26/2025</a:t>
+              <a:t>5/21/2025</a:t>
             </a:fld>
             <a:endParaRPr lang="en-US"/>
           </a:p>
@@ -2671,7 +2673,7 @@
           <a:p>
             <a:fld id="{3E102D2E-813C-461C-9963-687A650C48C0}" type="datetimeFigureOut">
               <a:rPr lang="en-US" smtClean="0"/>
-              <a:t>4/26/2025</a:t>
+              <a:t>5/21/2025</a:t>
             </a:fld>
             <a:endParaRPr lang="en-US"/>
           </a:p>
@@ -2912,7 +2914,7 @@
           <a:p>
             <a:fld id="{3E102D2E-813C-461C-9963-687A650C48C0}" type="datetimeFigureOut">
               <a:rPr lang="en-US" smtClean="0"/>
-              <a:t>4/26/2025</a:t>
+              <a:t>5/21/2025</a:t>
             </a:fld>
             <a:endParaRPr lang="en-US"/>
           </a:p>
@@ -3349,8 +3351,8 @@
         </p:nvSpPr>
         <p:spPr>
           <a:xfrm>
-            <a:off x="217714" y="255046"/>
-            <a:ext cx="11756571" cy="355354"/>
+            <a:off x="217714" y="189059"/>
+            <a:ext cx="11756571" cy="4909870"/>
           </a:xfrm>
           <a:prstGeom prst="rect">
             <a:avLst/>
@@ -3370,21 +3372,771 @@
               <a:buNone/>
             </a:pPr>
             <a:r>
-              <a:rPr kumimoji="0" lang="en-US" altLang="en-US" sz="1300" b="0" i="0" u="none" strike="noStrike" cap="none" normalizeH="0" baseline="0">
-                <a:ln>
-                  <a:noFill/>
-                </a:ln>
-                <a:solidFill>
-                  <a:schemeClr val="tx1"/>
-                </a:solidFill>
-                <a:effectLst/>
-                <a:latin typeface="Arial" panose="020B0604020202020204" pitchFamily="34" charset="0"/>
-              </a:rPr>
-              <a:t>.</a:t>
-            </a:r>
-          </a:p>
-        </p:txBody>
-      </p:sp>
+              <a:rPr kumimoji="0" lang="en-US" altLang="en-US" sz="1050" b="1" i="0" u="none" strike="noStrike" cap="none" normalizeH="0" baseline="0">
+                <a:ln>
+                  <a:noFill/>
+                </a:ln>
+                <a:solidFill>
+                  <a:srgbClr val="FF0000"/>
+                </a:solidFill>
+                <a:effectLst/>
+                <a:latin typeface="Arial" panose="020B0604020202020204" pitchFamily="34" charset="0"/>
+              </a:rPr>
+              <a:t>SUAL: Niyə a tagı ilə DELETE edə bilmirik, form istifadə edirik?</a:t>
+            </a:r>
+          </a:p>
+          <a:p>
+            <a:pPr>
+              <a:lnSpc>
+                <a:spcPct val="150000"/>
+              </a:lnSpc>
+              <a:buNone/>
+            </a:pPr>
+            <a:endParaRPr kumimoji="0" lang="en-US" altLang="en-US" sz="1050" b="1" i="0" u="none" strike="noStrike" cap="none" normalizeH="0" baseline="0">
+              <a:ln>
+                <a:noFill/>
+              </a:ln>
+              <a:solidFill>
+                <a:srgbClr val="FF0000"/>
+              </a:solidFill>
+              <a:effectLst/>
+              <a:latin typeface="Arial" panose="020B0604020202020204" pitchFamily="34" charset="0"/>
+            </a:endParaRPr>
+          </a:p>
+          <a:p>
+            <a:pPr>
+              <a:lnSpc>
+                <a:spcPct val="150000"/>
+              </a:lnSpc>
+              <a:buNone/>
+            </a:pPr>
+            <a:r>
+              <a:rPr kumimoji="0" lang="en-US" altLang="en-US" sz="1050" b="0" i="0" u="none" strike="noStrike" cap="none" normalizeH="0" baseline="0">
+                <a:ln>
+                  <a:noFill/>
+                </a:ln>
+                <a:solidFill>
+                  <a:schemeClr val="tx1"/>
+                </a:solidFill>
+                <a:effectLst/>
+                <a:latin typeface="Arial" panose="020B0604020202020204" pitchFamily="34" charset="0"/>
+              </a:rPr>
+              <a:t>1. </a:t>
+            </a:r>
+            <a:r>
+              <a:rPr kumimoji="0" lang="en-US" altLang="en-US" sz="1050" b="1" i="0" u="none" strike="noStrike" cap="none" normalizeH="0" baseline="0">
+                <a:ln>
+                  <a:noFill/>
+                </a:ln>
+                <a:solidFill>
+                  <a:srgbClr val="00B050"/>
+                </a:solidFill>
+                <a:effectLst/>
+                <a:latin typeface="Arial" panose="020B0604020202020204" pitchFamily="34" charset="0"/>
+              </a:rPr>
+              <a:t>&lt;a&gt;</a:t>
+            </a:r>
+            <a:r>
+              <a:rPr kumimoji="0" lang="en-US" altLang="en-US" sz="1050" b="0" i="0" u="none" strike="noStrike" cap="none" normalizeH="0" baseline="0">
+                <a:ln>
+                  <a:noFill/>
+                </a:ln>
+                <a:solidFill>
+                  <a:schemeClr val="tx1"/>
+                </a:solidFill>
+                <a:effectLst/>
+                <a:latin typeface="Arial" panose="020B0604020202020204" pitchFamily="34" charset="0"/>
+              </a:rPr>
+              <a:t> tagı yalnız </a:t>
+            </a:r>
+            <a:r>
+              <a:rPr kumimoji="0" lang="en-US" altLang="en-US" sz="1050" b="1" i="0" u="none" strike="noStrike" cap="none" normalizeH="0" baseline="0">
+                <a:ln>
+                  <a:noFill/>
+                </a:ln>
+                <a:solidFill>
+                  <a:srgbClr val="00B050"/>
+                </a:solidFill>
+                <a:effectLst/>
+                <a:latin typeface="Arial" panose="020B0604020202020204" pitchFamily="34" charset="0"/>
+              </a:rPr>
+              <a:t>GET request </a:t>
+            </a:r>
+            <a:r>
+              <a:rPr kumimoji="0" lang="en-US" altLang="en-US" sz="1050" b="0" i="0" u="none" strike="noStrike" cap="none" normalizeH="0" baseline="0">
+                <a:ln>
+                  <a:noFill/>
+                </a:ln>
+                <a:solidFill>
+                  <a:schemeClr val="tx1"/>
+                </a:solidFill>
+                <a:effectLst/>
+                <a:latin typeface="Arial" panose="020B0604020202020204" pitchFamily="34" charset="0"/>
+              </a:rPr>
+              <a:t>göndərə bilər</a:t>
+            </a:r>
+          </a:p>
+          <a:p>
+            <a:pPr>
+              <a:lnSpc>
+                <a:spcPct val="150000"/>
+              </a:lnSpc>
+              <a:buNone/>
+            </a:pPr>
+            <a:r>
+              <a:rPr kumimoji="0" lang="en-US" altLang="en-US" sz="1050" b="1" i="0" u="none" strike="noStrike" cap="none" normalizeH="0" baseline="0">
+                <a:ln>
+                  <a:noFill/>
+                </a:ln>
+                <a:solidFill>
+                  <a:schemeClr val="tx1"/>
+                </a:solidFill>
+                <a:effectLst/>
+                <a:latin typeface="Arial" panose="020B0604020202020204" pitchFamily="34" charset="0"/>
+              </a:rPr>
+              <a:t>&lt;a href="..."&gt; </a:t>
+            </a:r>
+            <a:r>
+              <a:rPr kumimoji="0" lang="en-US" altLang="en-US" sz="1050" b="0" i="0" u="none" strike="noStrike" cap="none" normalizeH="0" baseline="0">
+                <a:ln>
+                  <a:noFill/>
+                </a:ln>
+                <a:solidFill>
+                  <a:schemeClr val="tx1"/>
+                </a:solidFill>
+                <a:effectLst/>
+                <a:latin typeface="Arial" panose="020B0604020202020204" pitchFamily="34" charset="0"/>
+              </a:rPr>
+              <a:t>bir keçiddir və yalnız </a:t>
+            </a:r>
+            <a:r>
+              <a:rPr kumimoji="0" lang="en-US" altLang="en-US" sz="1050" b="1" i="0" u="none" strike="noStrike" cap="none" normalizeH="0" baseline="0">
+                <a:ln>
+                  <a:noFill/>
+                </a:ln>
+                <a:solidFill>
+                  <a:schemeClr val="tx1"/>
+                </a:solidFill>
+                <a:effectLst/>
+                <a:latin typeface="Arial" panose="020B0604020202020204" pitchFamily="34" charset="0"/>
+              </a:rPr>
+              <a:t>GET</a:t>
+            </a:r>
+            <a:r>
+              <a:rPr kumimoji="0" lang="en-US" altLang="en-US" sz="1050" b="0" i="0" u="none" strike="noStrike" cap="none" normalizeH="0" baseline="0">
+                <a:ln>
+                  <a:noFill/>
+                </a:ln>
+                <a:solidFill>
+                  <a:schemeClr val="tx1"/>
+                </a:solidFill>
+                <a:effectLst/>
+                <a:latin typeface="Arial" panose="020B0604020202020204" pitchFamily="34" charset="0"/>
+              </a:rPr>
+              <a:t> metodu ilə </a:t>
+            </a:r>
+            <a:r>
+              <a:rPr kumimoji="0" lang="en-US" altLang="en-US" sz="1050" b="1" i="0" u="none" strike="noStrike" cap="none" normalizeH="0" baseline="0">
+                <a:ln>
+                  <a:noFill/>
+                </a:ln>
+                <a:solidFill>
+                  <a:schemeClr val="tx1"/>
+                </a:solidFill>
+                <a:effectLst/>
+                <a:latin typeface="Arial" panose="020B0604020202020204" pitchFamily="34" charset="0"/>
+              </a:rPr>
+              <a:t>HTTP</a:t>
+            </a:r>
+            <a:r>
+              <a:rPr kumimoji="0" lang="en-US" altLang="en-US" sz="1050" b="0" i="0" u="none" strike="noStrike" cap="none" normalizeH="0" baseline="0">
+                <a:ln>
+                  <a:noFill/>
+                </a:ln>
+                <a:solidFill>
+                  <a:schemeClr val="tx1"/>
+                </a:solidFill>
+                <a:effectLst/>
+                <a:latin typeface="Arial" panose="020B0604020202020204" pitchFamily="34" charset="0"/>
+              </a:rPr>
+              <a:t> sorğusu göndərir.</a:t>
+            </a:r>
+          </a:p>
+          <a:p>
+            <a:pPr>
+              <a:lnSpc>
+                <a:spcPct val="150000"/>
+              </a:lnSpc>
+              <a:buNone/>
+            </a:pPr>
+            <a:endParaRPr kumimoji="0" lang="en-US" altLang="en-US" sz="1050" b="0" i="0" u="none" strike="noStrike" cap="none" normalizeH="0" baseline="0">
+              <a:ln>
+                <a:noFill/>
+              </a:ln>
+              <a:solidFill>
+                <a:schemeClr val="tx1"/>
+              </a:solidFill>
+              <a:effectLst/>
+              <a:latin typeface="Arial" panose="020B0604020202020204" pitchFamily="34" charset="0"/>
+            </a:endParaRPr>
+          </a:p>
+          <a:p>
+            <a:pPr>
+              <a:lnSpc>
+                <a:spcPct val="150000"/>
+              </a:lnSpc>
+              <a:buNone/>
+            </a:pPr>
+            <a:r>
+              <a:rPr kumimoji="0" lang="en-US" altLang="en-US" sz="1050" b="1" i="0" u="none" strike="noStrike" cap="none" normalizeH="0" baseline="0">
+                <a:ln>
+                  <a:noFill/>
+                </a:ln>
+                <a:solidFill>
+                  <a:schemeClr val="tx1"/>
+                </a:solidFill>
+                <a:effectLst/>
+                <a:latin typeface="Arial" panose="020B0604020202020204" pitchFamily="34" charset="0"/>
+              </a:rPr>
+              <a:t>Bu səbəbdən</a:t>
+            </a:r>
+            <a:r>
+              <a:rPr kumimoji="0" lang="en-US" altLang="en-US" sz="1050" b="0" i="0" u="none" strike="noStrike" cap="none" normalizeH="0" baseline="0">
+                <a:ln>
+                  <a:noFill/>
+                </a:ln>
+                <a:solidFill>
+                  <a:schemeClr val="tx1"/>
+                </a:solidFill>
+                <a:effectLst/>
+                <a:latin typeface="Arial" panose="020B0604020202020204" pitchFamily="34" charset="0"/>
+              </a:rPr>
+              <a:t>:</a:t>
+            </a:r>
+          </a:p>
+          <a:p>
+            <a:pPr marL="285750" indent="-285750">
+              <a:lnSpc>
+                <a:spcPct val="150000"/>
+              </a:lnSpc>
+              <a:buFont typeface="Arial" panose="020B0604020202020204" pitchFamily="34" charset="0"/>
+              <a:buChar char="•"/>
+            </a:pPr>
+            <a:r>
+              <a:rPr kumimoji="0" lang="en-US" altLang="en-US" sz="1050" b="0" i="0" u="none" strike="noStrike" cap="none" normalizeH="0" baseline="0">
+                <a:ln>
+                  <a:noFill/>
+                </a:ln>
+                <a:solidFill>
+                  <a:schemeClr val="tx1"/>
+                </a:solidFill>
+                <a:effectLst/>
+                <a:latin typeface="Arial" panose="020B0604020202020204" pitchFamily="34" charset="0"/>
+              </a:rPr>
+              <a:t>href ilə </a:t>
+            </a:r>
+            <a:r>
+              <a:rPr kumimoji="0" lang="en-US" altLang="en-US" sz="1050" b="1" i="0" u="none" strike="noStrike" cap="none" normalizeH="0" baseline="0">
+                <a:ln>
+                  <a:noFill/>
+                </a:ln>
+                <a:solidFill>
+                  <a:srgbClr val="0070C0"/>
+                </a:solidFill>
+                <a:effectLst/>
+                <a:latin typeface="Arial" panose="020B0604020202020204" pitchFamily="34" charset="0"/>
+              </a:rPr>
+              <a:t>DELETE</a:t>
+            </a:r>
+            <a:r>
+              <a:rPr kumimoji="0" lang="en-US" altLang="en-US" sz="1050" b="0" i="0" u="none" strike="noStrike" cap="none" normalizeH="0" baseline="0">
+                <a:ln>
+                  <a:noFill/>
+                </a:ln>
+                <a:solidFill>
+                  <a:schemeClr val="tx1"/>
+                </a:solidFill>
+                <a:effectLst/>
+                <a:latin typeface="Arial" panose="020B0604020202020204" pitchFamily="34" charset="0"/>
+              </a:rPr>
+              <a:t>, </a:t>
+            </a:r>
+            <a:r>
+              <a:rPr kumimoji="0" lang="en-US" altLang="en-US" sz="1050" b="1" i="0" u="none" strike="noStrike" cap="none" normalizeH="0" baseline="0">
+                <a:ln>
+                  <a:noFill/>
+                </a:ln>
+                <a:solidFill>
+                  <a:srgbClr val="0070C0"/>
+                </a:solidFill>
+                <a:effectLst/>
+                <a:latin typeface="Arial" panose="020B0604020202020204" pitchFamily="34" charset="0"/>
+              </a:rPr>
+              <a:t>POST</a:t>
+            </a:r>
+            <a:r>
+              <a:rPr kumimoji="0" lang="en-US" altLang="en-US" sz="1050" b="0" i="0" u="none" strike="noStrike" cap="none" normalizeH="0" baseline="0">
+                <a:ln>
+                  <a:noFill/>
+                </a:ln>
+                <a:solidFill>
+                  <a:schemeClr val="tx1"/>
+                </a:solidFill>
+                <a:effectLst/>
+                <a:latin typeface="Arial" panose="020B0604020202020204" pitchFamily="34" charset="0"/>
+              </a:rPr>
+              <a:t>, </a:t>
+            </a:r>
+            <a:r>
+              <a:rPr kumimoji="0" lang="en-US" altLang="en-US" sz="1050" b="1" i="0" u="none" strike="noStrike" cap="none" normalizeH="0" baseline="0">
+                <a:ln>
+                  <a:noFill/>
+                </a:ln>
+                <a:solidFill>
+                  <a:srgbClr val="0070C0"/>
+                </a:solidFill>
+                <a:effectLst/>
+                <a:latin typeface="Arial" panose="020B0604020202020204" pitchFamily="34" charset="0"/>
+              </a:rPr>
+              <a:t>PUT</a:t>
+            </a:r>
+            <a:r>
+              <a:rPr kumimoji="0" lang="en-US" altLang="en-US" sz="1050" b="0" i="0" u="none" strike="noStrike" cap="none" normalizeH="0" baseline="0">
+                <a:ln>
+                  <a:noFill/>
+                </a:ln>
+                <a:solidFill>
+                  <a:schemeClr val="tx1"/>
+                </a:solidFill>
+                <a:effectLst/>
+                <a:latin typeface="Arial" panose="020B0604020202020204" pitchFamily="34" charset="0"/>
+              </a:rPr>
+              <a:t>, </a:t>
+            </a:r>
+            <a:r>
+              <a:rPr kumimoji="0" lang="en-US" altLang="en-US" sz="1050" b="1" i="0" u="none" strike="noStrike" cap="none" normalizeH="0" baseline="0">
+                <a:ln>
+                  <a:noFill/>
+                </a:ln>
+                <a:solidFill>
+                  <a:srgbClr val="0070C0"/>
+                </a:solidFill>
+                <a:effectLst/>
+                <a:latin typeface="Arial" panose="020B0604020202020204" pitchFamily="34" charset="0"/>
+              </a:rPr>
+              <a:t>PATCH</a:t>
+            </a:r>
+            <a:r>
+              <a:rPr kumimoji="0" lang="en-US" altLang="en-US" sz="1050" b="0" i="0" u="none" strike="noStrike" cap="none" normalizeH="0" baseline="0">
+                <a:ln>
+                  <a:noFill/>
+                </a:ln>
+                <a:solidFill>
+                  <a:schemeClr val="tx1"/>
+                </a:solidFill>
+                <a:effectLst/>
+                <a:latin typeface="Arial" panose="020B0604020202020204" pitchFamily="34" charset="0"/>
+              </a:rPr>
+              <a:t> və s. göndərmək mümkün deyil. Bu, HTML-in öz spesifikasiyasıdır.</a:t>
+            </a:r>
+          </a:p>
+          <a:p>
+            <a:pPr>
+              <a:lnSpc>
+                <a:spcPct val="150000"/>
+              </a:lnSpc>
+              <a:buNone/>
+            </a:pPr>
+            <a:endParaRPr lang="en-US" altLang="en-US" sz="1050">
+              <a:latin typeface="Arial" panose="020B0604020202020204" pitchFamily="34" charset="0"/>
+            </a:endParaRPr>
+          </a:p>
+          <a:p>
+            <a:pPr>
+              <a:lnSpc>
+                <a:spcPct val="150000"/>
+              </a:lnSpc>
+              <a:buNone/>
+            </a:pPr>
+            <a:endParaRPr kumimoji="0" lang="en-US" altLang="en-US" sz="1050" b="0" i="0" u="none" strike="noStrike" cap="none" normalizeH="0" baseline="0">
+              <a:ln>
+                <a:noFill/>
+              </a:ln>
+              <a:solidFill>
+                <a:schemeClr val="tx1"/>
+              </a:solidFill>
+              <a:effectLst/>
+              <a:latin typeface="Arial" panose="020B0604020202020204" pitchFamily="34" charset="0"/>
+            </a:endParaRPr>
+          </a:p>
+          <a:p>
+            <a:pPr>
+              <a:lnSpc>
+                <a:spcPct val="150000"/>
+              </a:lnSpc>
+              <a:buNone/>
+            </a:pPr>
+            <a:r>
+              <a:rPr kumimoji="0" lang="en-US" altLang="en-US" sz="1050" b="1" i="0" u="none" strike="noStrike" cap="none" normalizeH="0" baseline="0">
+                <a:ln>
+                  <a:noFill/>
+                </a:ln>
+                <a:solidFill>
+                  <a:schemeClr val="tx1"/>
+                </a:solidFill>
+                <a:effectLst/>
+                <a:latin typeface="Arial" panose="020B0604020202020204" pitchFamily="34" charset="0"/>
+              </a:rPr>
+              <a:t>HTML</a:t>
+            </a:r>
+            <a:r>
+              <a:rPr kumimoji="0" lang="en-US" altLang="en-US" sz="1050" b="0" i="0" u="none" strike="noStrike" cap="none" normalizeH="0" baseline="0">
+                <a:ln>
+                  <a:noFill/>
+                </a:ln>
+                <a:solidFill>
+                  <a:schemeClr val="tx1"/>
+                </a:solidFill>
+                <a:effectLst/>
+                <a:latin typeface="Arial" panose="020B0604020202020204" pitchFamily="34" charset="0"/>
+              </a:rPr>
+              <a:t> formaları isə sadəcə </a:t>
+            </a:r>
+            <a:r>
+              <a:rPr kumimoji="0" lang="en-US" altLang="en-US" sz="1050" b="1" i="0" u="none" strike="noStrike" cap="none" normalizeH="0" baseline="0">
+                <a:ln>
+                  <a:noFill/>
+                </a:ln>
+                <a:solidFill>
+                  <a:schemeClr val="tx1"/>
+                </a:solidFill>
+                <a:effectLst/>
+                <a:latin typeface="Arial" panose="020B0604020202020204" pitchFamily="34" charset="0"/>
+              </a:rPr>
+              <a:t>GET</a:t>
+            </a:r>
+            <a:r>
+              <a:rPr kumimoji="0" lang="en-US" altLang="en-US" sz="1050" b="0" i="0" u="none" strike="noStrike" cap="none" normalizeH="0" baseline="0">
+                <a:ln>
+                  <a:noFill/>
+                </a:ln>
+                <a:solidFill>
+                  <a:schemeClr val="tx1"/>
+                </a:solidFill>
+                <a:effectLst/>
+                <a:latin typeface="Arial" panose="020B0604020202020204" pitchFamily="34" charset="0"/>
+              </a:rPr>
+              <a:t> və </a:t>
+            </a:r>
+            <a:r>
+              <a:rPr kumimoji="0" lang="en-US" altLang="en-US" sz="1050" b="1" i="0" u="none" strike="noStrike" cap="none" normalizeH="0" baseline="0">
+                <a:ln>
+                  <a:noFill/>
+                </a:ln>
+                <a:solidFill>
+                  <a:schemeClr val="tx1"/>
+                </a:solidFill>
+                <a:effectLst/>
+                <a:latin typeface="Arial" panose="020B0604020202020204" pitchFamily="34" charset="0"/>
+              </a:rPr>
+              <a:t>POST</a:t>
+            </a:r>
+            <a:r>
+              <a:rPr kumimoji="0" lang="en-US" altLang="en-US" sz="1050" b="0" i="0" u="none" strike="noStrike" cap="none" normalizeH="0" baseline="0">
+                <a:ln>
+                  <a:noFill/>
+                </a:ln>
+                <a:solidFill>
+                  <a:schemeClr val="tx1"/>
+                </a:solidFill>
+                <a:effectLst/>
+                <a:latin typeface="Arial" panose="020B0604020202020204" pitchFamily="34" charset="0"/>
+              </a:rPr>
+              <a:t> metodlarını dəstəkləyir</a:t>
+            </a:r>
+          </a:p>
+          <a:p>
+            <a:pPr>
+              <a:lnSpc>
+                <a:spcPct val="150000"/>
+              </a:lnSpc>
+              <a:buNone/>
+            </a:pPr>
+            <a:r>
+              <a:rPr kumimoji="0" lang="en-US" altLang="en-US" sz="1050" b="0" i="0" u="none" strike="noStrike" cap="none" normalizeH="0" baseline="0">
+                <a:ln>
+                  <a:noFill/>
+                </a:ln>
+                <a:solidFill>
+                  <a:schemeClr val="tx1"/>
+                </a:solidFill>
+                <a:effectLst/>
+                <a:latin typeface="Arial" panose="020B0604020202020204" pitchFamily="34" charset="0"/>
+              </a:rPr>
+              <a:t>Bəs necə </a:t>
+            </a:r>
+            <a:r>
+              <a:rPr kumimoji="0" lang="en-US" altLang="en-US" sz="1050" b="1" i="0" u="none" strike="noStrike" cap="none" normalizeH="0" baseline="0">
+                <a:ln>
+                  <a:noFill/>
+                </a:ln>
+                <a:solidFill>
+                  <a:schemeClr val="tx1"/>
+                </a:solidFill>
+                <a:effectLst/>
+                <a:latin typeface="Arial" panose="020B0604020202020204" pitchFamily="34" charset="0"/>
+              </a:rPr>
+              <a:t>DELETE</a:t>
+            </a:r>
+            <a:r>
+              <a:rPr kumimoji="0" lang="en-US" altLang="en-US" sz="1050" b="0" i="0" u="none" strike="noStrike" cap="none" normalizeH="0" baseline="0">
+                <a:ln>
+                  <a:noFill/>
+                </a:ln>
+                <a:solidFill>
+                  <a:schemeClr val="tx1"/>
+                </a:solidFill>
+                <a:effectLst/>
+                <a:latin typeface="Arial" panose="020B0604020202020204" pitchFamily="34" charset="0"/>
+              </a:rPr>
+              <a:t> göndəririk?</a:t>
+            </a:r>
+          </a:p>
+          <a:p>
+            <a:pPr>
+              <a:lnSpc>
+                <a:spcPct val="150000"/>
+              </a:lnSpc>
+              <a:buNone/>
+            </a:pPr>
+            <a:endParaRPr kumimoji="0" lang="en-US" altLang="en-US" sz="1050" b="0" i="0" u="none" strike="noStrike" cap="none" normalizeH="0" baseline="0">
+              <a:ln>
+                <a:noFill/>
+              </a:ln>
+              <a:solidFill>
+                <a:schemeClr val="tx1"/>
+              </a:solidFill>
+              <a:effectLst/>
+              <a:latin typeface="Arial" panose="020B0604020202020204" pitchFamily="34" charset="0"/>
+            </a:endParaRPr>
+          </a:p>
+          <a:p>
+            <a:pPr>
+              <a:lnSpc>
+                <a:spcPct val="150000"/>
+              </a:lnSpc>
+              <a:buNone/>
+            </a:pPr>
+            <a:r>
+              <a:rPr kumimoji="0" lang="en-US" altLang="en-US" sz="1050" b="0" i="0" u="none" strike="noStrike" cap="none" normalizeH="0" baseline="0">
+                <a:ln>
+                  <a:noFill/>
+                </a:ln>
+                <a:solidFill>
+                  <a:schemeClr val="tx1"/>
+                </a:solidFill>
+                <a:effectLst/>
+                <a:latin typeface="Arial" panose="020B0604020202020204" pitchFamily="34" charset="0"/>
+              </a:rPr>
+              <a:t>Laravel bu problemi belə həll edir:</a:t>
+            </a:r>
+          </a:p>
+          <a:p>
+            <a:pPr>
+              <a:lnSpc>
+                <a:spcPct val="150000"/>
+              </a:lnSpc>
+              <a:buNone/>
+            </a:pPr>
+            <a:endParaRPr lang="en-US" altLang="en-US" sz="1050">
+              <a:latin typeface="Arial" panose="020B0604020202020204" pitchFamily="34" charset="0"/>
+            </a:endParaRPr>
+          </a:p>
+          <a:p>
+            <a:pPr>
+              <a:lnSpc>
+                <a:spcPct val="150000"/>
+              </a:lnSpc>
+              <a:buNone/>
+            </a:pPr>
+            <a:endParaRPr kumimoji="0" lang="en-US" altLang="en-US" sz="1050" b="0" i="0" u="none" strike="noStrike" cap="none" normalizeH="0" baseline="0">
+              <a:ln>
+                <a:noFill/>
+              </a:ln>
+              <a:solidFill>
+                <a:schemeClr val="tx1"/>
+              </a:solidFill>
+              <a:effectLst/>
+              <a:latin typeface="Arial" panose="020B0604020202020204" pitchFamily="34" charset="0"/>
+            </a:endParaRPr>
+          </a:p>
+          <a:p>
+            <a:pPr>
+              <a:lnSpc>
+                <a:spcPct val="150000"/>
+              </a:lnSpc>
+              <a:buNone/>
+            </a:pPr>
+            <a:endParaRPr lang="en-US" altLang="en-US" sz="1050">
+              <a:latin typeface="Arial" panose="020B0604020202020204" pitchFamily="34" charset="0"/>
+            </a:endParaRPr>
+          </a:p>
+          <a:p>
+            <a:pPr>
+              <a:lnSpc>
+                <a:spcPct val="150000"/>
+              </a:lnSpc>
+              <a:buNone/>
+            </a:pPr>
+            <a:endParaRPr lang="en-US" altLang="en-US" sz="1050">
+              <a:latin typeface="Arial" panose="020B0604020202020204" pitchFamily="34" charset="0"/>
+            </a:endParaRPr>
+          </a:p>
+          <a:p>
+            <a:pPr>
+              <a:lnSpc>
+                <a:spcPct val="150000"/>
+              </a:lnSpc>
+              <a:buNone/>
+            </a:pPr>
+            <a:r>
+              <a:rPr kumimoji="0" lang="en-US" altLang="en-US" sz="1050" b="0" i="0" u="none" strike="noStrike" cap="none" normalizeH="0" baseline="0">
+                <a:ln>
+                  <a:noFill/>
+                </a:ln>
+                <a:solidFill>
+                  <a:schemeClr val="tx1"/>
+                </a:solidFill>
+                <a:effectLst/>
+                <a:latin typeface="Arial" panose="020B0604020202020204" pitchFamily="34" charset="0"/>
+              </a:rPr>
+              <a:t>@method('DELETE') → Laravel bu gizli input-u istifadə edərək POST request-i DELETE kimi "spoof" edir.</a:t>
+            </a:r>
+          </a:p>
+          <a:p>
+            <a:pPr>
+              <a:lnSpc>
+                <a:spcPct val="150000"/>
+              </a:lnSpc>
+              <a:buNone/>
+            </a:pPr>
+            <a:endParaRPr lang="en-US" altLang="en-US" sz="1050">
+              <a:latin typeface="Arial" panose="020B0604020202020204" pitchFamily="34" charset="0"/>
+            </a:endParaRPr>
+          </a:p>
+          <a:p>
+            <a:pPr>
+              <a:lnSpc>
+                <a:spcPct val="150000"/>
+              </a:lnSpc>
+              <a:buNone/>
+            </a:pPr>
+            <a:r>
+              <a:rPr kumimoji="0" lang="en-US" altLang="en-US" sz="1050" b="0" i="0" u="none" strike="noStrike" cap="none" normalizeH="0" baseline="0">
+                <a:ln>
+                  <a:noFill/>
+                </a:ln>
+                <a:solidFill>
+                  <a:schemeClr val="tx1"/>
+                </a:solidFill>
+                <a:effectLst/>
+                <a:latin typeface="Arial" panose="020B0604020202020204" pitchFamily="34" charset="0"/>
+              </a:rPr>
+              <a:t>Gələn sorğunun içində belə bir hidden input olacaq: Laravel bunu analiz edib DELETE kimi qəbul edir.</a:t>
+            </a:r>
+          </a:p>
+        </p:txBody>
+      </p:sp>
+      <p:pic>
+        <p:nvPicPr>
+          <p:cNvPr id="4" name="Picture 3">
+            <a:extLst>
+              <a:ext uri="{FF2B5EF4-FFF2-40B4-BE49-F238E27FC236}">
+                <a16:creationId xmlns:a16="http://schemas.microsoft.com/office/drawing/2014/main" id="{BB2FF708-6CC2-2738-30B0-96A379D94492}"/>
+              </a:ext>
+            </a:extLst>
+          </p:cNvPr>
+          <p:cNvPicPr>
+            <a:picLocks noChangeAspect="1"/>
+          </p:cNvPicPr>
+          <p:nvPr/>
+        </p:nvPicPr>
+        <p:blipFill>
+          <a:blip r:embed="rId2"/>
+          <a:stretch>
+            <a:fillRect/>
+          </a:stretch>
+        </p:blipFill>
+        <p:spPr>
+          <a:xfrm>
+            <a:off x="6749592" y="2503106"/>
+            <a:ext cx="5442408" cy="4354893"/>
+          </a:xfrm>
+          <a:prstGeom prst="rect">
+            <a:avLst/>
+          </a:prstGeom>
+        </p:spPr>
+      </p:pic>
+      <p:pic>
+        <p:nvPicPr>
+          <p:cNvPr id="7" name="Picture 6">
+            <a:extLst>
+              <a:ext uri="{FF2B5EF4-FFF2-40B4-BE49-F238E27FC236}">
+                <a16:creationId xmlns:a16="http://schemas.microsoft.com/office/drawing/2014/main" id="{2298D8F9-B850-F579-0A16-10404D8A46BE}"/>
+              </a:ext>
+            </a:extLst>
+          </p:cNvPr>
+          <p:cNvPicPr>
+            <a:picLocks noChangeAspect="1"/>
+          </p:cNvPicPr>
+          <p:nvPr/>
+        </p:nvPicPr>
+        <p:blipFill>
+          <a:blip r:embed="rId3"/>
+          <a:stretch>
+            <a:fillRect/>
+          </a:stretch>
+        </p:blipFill>
+        <p:spPr>
+          <a:xfrm>
+            <a:off x="217714" y="3429000"/>
+            <a:ext cx="1667647" cy="745119"/>
+          </a:xfrm>
+          <a:prstGeom prst="rect">
+            <a:avLst/>
+          </a:prstGeom>
+        </p:spPr>
+      </p:pic>
+      <p:pic>
+        <p:nvPicPr>
+          <p:cNvPr id="10" name="Picture 9">
+            <a:extLst>
+              <a:ext uri="{FF2B5EF4-FFF2-40B4-BE49-F238E27FC236}">
+                <a16:creationId xmlns:a16="http://schemas.microsoft.com/office/drawing/2014/main" id="{3CCB781E-7978-337C-C2E5-966B9A10BA77}"/>
+              </a:ext>
+            </a:extLst>
+          </p:cNvPr>
+          <p:cNvPicPr>
+            <a:picLocks noChangeAspect="1"/>
+          </p:cNvPicPr>
+          <p:nvPr/>
+        </p:nvPicPr>
+        <p:blipFill>
+          <a:blip r:embed="rId4"/>
+          <a:stretch>
+            <a:fillRect/>
+          </a:stretch>
+        </p:blipFill>
+        <p:spPr>
+          <a:xfrm>
+            <a:off x="217714" y="5192542"/>
+            <a:ext cx="4496427" cy="523948"/>
+          </a:xfrm>
+          <a:prstGeom prst="rect">
+            <a:avLst/>
+          </a:prstGeom>
+        </p:spPr>
+      </p:pic>
     </p:spTree>
     <p:extLst>
       <p:ext uri="{BB962C8B-B14F-4D97-AF65-F5344CB8AC3E}">
@@ -3436,7 +4188,7 @@
         <p:spPr>
           <a:xfrm>
             <a:off x="217714" y="255046"/>
-            <a:ext cx="11756571" cy="355354"/>
+            <a:ext cx="11756571" cy="3056093"/>
           </a:xfrm>
           <a:prstGeom prst="rect">
             <a:avLst/>
@@ -3466,11 +4218,498 @@
                 <a:effectLst/>
                 <a:latin typeface="Arial" panose="020B0604020202020204" pitchFamily="34" charset="0"/>
               </a:rPr>
-              <a:t>.</a:t>
-            </a:r>
-          </a:p>
-        </p:txBody>
-      </p:sp>
+              <a:t>3. </a:t>
+            </a:r>
+            <a:r>
+              <a:rPr kumimoji="0" lang="en-US" altLang="en-US" sz="1300" b="1" i="0" u="none" strike="noStrike" cap="none" normalizeH="0" baseline="0">
+                <a:ln>
+                  <a:noFill/>
+                </a:ln>
+                <a:solidFill>
+                  <a:schemeClr val="tx1"/>
+                </a:solidFill>
+                <a:effectLst/>
+                <a:latin typeface="Arial" panose="020B0604020202020204" pitchFamily="34" charset="0"/>
+              </a:rPr>
+              <a:t>Niyə təhlükəsizlik baxımından form daha doğrudur</a:t>
+            </a:r>
+            <a:r>
+              <a:rPr kumimoji="0" lang="en-US" altLang="en-US" sz="1300" b="0" i="0" u="none" strike="noStrike" cap="none" normalizeH="0" baseline="0">
+                <a:ln>
+                  <a:noFill/>
+                </a:ln>
+                <a:solidFill>
+                  <a:schemeClr val="tx1"/>
+                </a:solidFill>
+                <a:effectLst/>
+                <a:latin typeface="Arial" panose="020B0604020202020204" pitchFamily="34" charset="0"/>
+              </a:rPr>
+              <a:t>?</a:t>
+            </a:r>
+          </a:p>
+          <a:p>
+            <a:pPr marL="742950" lvl="1" indent="-285750">
+              <a:lnSpc>
+                <a:spcPct val="150000"/>
+              </a:lnSpc>
+              <a:buFont typeface="Arial" panose="020B0604020202020204" pitchFamily="34" charset="0"/>
+              <a:buChar char="•"/>
+            </a:pPr>
+            <a:r>
+              <a:rPr kumimoji="0" lang="en-US" altLang="en-US" sz="1300" b="0" i="0" u="none" strike="noStrike" cap="none" normalizeH="0" baseline="0">
+                <a:ln>
+                  <a:noFill/>
+                </a:ln>
+                <a:solidFill>
+                  <a:schemeClr val="tx1"/>
+                </a:solidFill>
+                <a:effectLst/>
+                <a:latin typeface="Arial" panose="020B0604020202020204" pitchFamily="34" charset="0"/>
+              </a:rPr>
+              <a:t>Form vasitəsilə </a:t>
+            </a:r>
+            <a:r>
+              <a:rPr kumimoji="0" lang="en-US" altLang="en-US" sz="1300" b="1" i="0" u="none" strike="noStrike" cap="none" normalizeH="0" baseline="0">
+                <a:ln>
+                  <a:noFill/>
+                </a:ln>
+                <a:solidFill>
+                  <a:schemeClr val="tx1"/>
+                </a:solidFill>
+                <a:effectLst/>
+                <a:latin typeface="Arial" panose="020B0604020202020204" pitchFamily="34" charset="0"/>
+              </a:rPr>
+              <a:t>@csrf </a:t>
+            </a:r>
+            <a:r>
+              <a:rPr kumimoji="0" lang="en-US" altLang="en-US" sz="1300" b="0" i="0" u="none" strike="noStrike" cap="none" normalizeH="0" baseline="0">
+                <a:ln>
+                  <a:noFill/>
+                </a:ln>
+                <a:solidFill>
+                  <a:schemeClr val="tx1"/>
+                </a:solidFill>
+                <a:effectLst/>
+                <a:latin typeface="Arial" panose="020B0604020202020204" pitchFamily="34" charset="0"/>
+              </a:rPr>
+              <a:t>token əlavə edə bilirik.</a:t>
+            </a:r>
+          </a:p>
+          <a:p>
+            <a:pPr marL="742950" lvl="1" indent="-285750">
+              <a:lnSpc>
+                <a:spcPct val="150000"/>
+              </a:lnSpc>
+              <a:buFont typeface="Arial" panose="020B0604020202020204" pitchFamily="34" charset="0"/>
+              <a:buChar char="•"/>
+            </a:pPr>
+            <a:r>
+              <a:rPr kumimoji="0" lang="en-US" altLang="en-US" sz="1300" b="1" i="0" u="none" strike="noStrike" cap="none" normalizeH="0" baseline="0">
+                <a:ln>
+                  <a:noFill/>
+                </a:ln>
+                <a:solidFill>
+                  <a:schemeClr val="tx1"/>
+                </a:solidFill>
+                <a:effectLst/>
+                <a:latin typeface="Arial" panose="020B0604020202020204" pitchFamily="34" charset="0"/>
+              </a:rPr>
+              <a:t>a</a:t>
+            </a:r>
+            <a:r>
+              <a:rPr kumimoji="0" lang="en-US" altLang="en-US" sz="1300" b="0" i="0" u="none" strike="noStrike" cap="none" normalizeH="0" baseline="0">
+                <a:ln>
+                  <a:noFill/>
+                </a:ln>
+                <a:solidFill>
+                  <a:schemeClr val="tx1"/>
+                </a:solidFill>
+                <a:effectLst/>
+                <a:latin typeface="Arial" panose="020B0604020202020204" pitchFamily="34" charset="0"/>
+              </a:rPr>
+              <a:t> tagı ilə bu mümkün deyil.</a:t>
+            </a:r>
+          </a:p>
+          <a:p>
+            <a:pPr marL="742950" lvl="1" indent="-285750">
+              <a:lnSpc>
+                <a:spcPct val="150000"/>
+              </a:lnSpc>
+              <a:buFont typeface="Arial" panose="020B0604020202020204" pitchFamily="34" charset="0"/>
+              <a:buChar char="•"/>
+            </a:pPr>
+            <a:r>
+              <a:rPr kumimoji="0" lang="en-US" altLang="en-US" sz="1300" b="1" i="0" u="none" strike="noStrike" cap="none" normalizeH="0" baseline="0">
+                <a:ln>
+                  <a:noFill/>
+                </a:ln>
+                <a:solidFill>
+                  <a:schemeClr val="tx1"/>
+                </a:solidFill>
+                <a:effectLst/>
+                <a:latin typeface="Arial" panose="020B0604020202020204" pitchFamily="34" charset="0"/>
+              </a:rPr>
+              <a:t>DELETE</a:t>
+            </a:r>
+            <a:r>
+              <a:rPr kumimoji="0" lang="en-US" altLang="en-US" sz="1300" b="0" i="0" u="none" strike="noStrike" cap="none" normalizeH="0" baseline="0">
+                <a:ln>
+                  <a:noFill/>
+                </a:ln>
+                <a:solidFill>
+                  <a:schemeClr val="tx1"/>
+                </a:solidFill>
+                <a:effectLst/>
+                <a:latin typeface="Arial" panose="020B0604020202020204" pitchFamily="34" charset="0"/>
+              </a:rPr>
+              <a:t> və ya </a:t>
+            </a:r>
+            <a:r>
+              <a:rPr kumimoji="0" lang="en-US" altLang="en-US" sz="1300" b="1" i="0" u="none" strike="noStrike" cap="none" normalizeH="0" baseline="0">
+                <a:ln>
+                  <a:noFill/>
+                </a:ln>
+                <a:solidFill>
+                  <a:schemeClr val="tx1"/>
+                </a:solidFill>
+                <a:effectLst/>
+                <a:latin typeface="Arial" panose="020B0604020202020204" pitchFamily="34" charset="0"/>
+              </a:rPr>
+              <a:t>POST</a:t>
+            </a:r>
+            <a:r>
+              <a:rPr kumimoji="0" lang="en-US" altLang="en-US" sz="1300" b="0" i="0" u="none" strike="noStrike" cap="none" normalizeH="0" baseline="0">
+                <a:ln>
+                  <a:noFill/>
+                </a:ln>
+                <a:solidFill>
+                  <a:schemeClr val="tx1"/>
+                </a:solidFill>
+                <a:effectLst/>
+                <a:latin typeface="Arial" panose="020B0604020202020204" pitchFamily="34" charset="0"/>
+              </a:rPr>
+              <a:t> sorğular mütləq </a:t>
+            </a:r>
+            <a:r>
+              <a:rPr kumimoji="0" lang="en-US" altLang="en-US" sz="1300" b="1" i="0" u="none" strike="noStrike" cap="none" normalizeH="0" baseline="0">
+                <a:ln>
+                  <a:noFill/>
+                </a:ln>
+                <a:solidFill>
+                  <a:schemeClr val="tx1"/>
+                </a:solidFill>
+                <a:effectLst/>
+                <a:latin typeface="Arial" panose="020B0604020202020204" pitchFamily="34" charset="0"/>
+              </a:rPr>
+              <a:t>@csrf </a:t>
+            </a:r>
+            <a:r>
+              <a:rPr kumimoji="0" lang="en-US" altLang="en-US" sz="1300" b="0" i="0" u="none" strike="noStrike" cap="none" normalizeH="0" baseline="0">
+                <a:ln>
+                  <a:noFill/>
+                </a:ln>
+                <a:solidFill>
+                  <a:schemeClr val="tx1"/>
+                </a:solidFill>
+                <a:effectLst/>
+                <a:latin typeface="Arial" panose="020B0604020202020204" pitchFamily="34" charset="0"/>
+              </a:rPr>
+              <a:t>ilə qorunmalıdır. Bu da form tələb edir.</a:t>
+            </a:r>
+          </a:p>
+          <a:p>
+            <a:pPr>
+              <a:lnSpc>
+                <a:spcPct val="150000"/>
+              </a:lnSpc>
+              <a:buNone/>
+            </a:pPr>
+            <a:endParaRPr lang="en-US" altLang="en-US" sz="1300">
+              <a:latin typeface="Arial" panose="020B0604020202020204" pitchFamily="34" charset="0"/>
+            </a:endParaRPr>
+          </a:p>
+          <a:p>
+            <a:pPr>
+              <a:lnSpc>
+                <a:spcPct val="150000"/>
+              </a:lnSpc>
+              <a:buNone/>
+            </a:pPr>
+            <a:endParaRPr kumimoji="0" lang="en-US" altLang="en-US" sz="1300" b="0" i="0" u="none" strike="noStrike" cap="none" normalizeH="0" baseline="0">
+              <a:ln>
+                <a:noFill/>
+              </a:ln>
+              <a:solidFill>
+                <a:schemeClr val="tx1"/>
+              </a:solidFill>
+              <a:effectLst/>
+              <a:latin typeface="Arial" panose="020B0604020202020204" pitchFamily="34" charset="0"/>
+            </a:endParaRPr>
+          </a:p>
+          <a:p>
+            <a:pPr>
+              <a:lnSpc>
+                <a:spcPct val="150000"/>
+              </a:lnSpc>
+              <a:buNone/>
+            </a:pPr>
+            <a:endParaRPr kumimoji="0" lang="en-US" altLang="en-US" sz="1300" b="0" i="0" u="none" strike="noStrike" cap="none" normalizeH="0" baseline="0">
+              <a:ln>
+                <a:noFill/>
+              </a:ln>
+              <a:solidFill>
+                <a:schemeClr val="tx1"/>
+              </a:solidFill>
+              <a:effectLst/>
+              <a:latin typeface="Arial" panose="020B0604020202020204" pitchFamily="34" charset="0"/>
+            </a:endParaRPr>
+          </a:p>
+          <a:p>
+            <a:pPr>
+              <a:lnSpc>
+                <a:spcPct val="150000"/>
+              </a:lnSpc>
+              <a:buNone/>
+            </a:pPr>
+            <a:endParaRPr lang="en-US" altLang="en-US" sz="1300">
+              <a:latin typeface="Arial" panose="020B0604020202020204" pitchFamily="34" charset="0"/>
+            </a:endParaRPr>
+          </a:p>
+          <a:p>
+            <a:pPr>
+              <a:lnSpc>
+                <a:spcPct val="150000"/>
+              </a:lnSpc>
+              <a:buNone/>
+            </a:pPr>
+            <a:r>
+              <a:rPr kumimoji="0" lang="en-US" altLang="en-US" sz="1300" b="0" i="0" u="none" strike="noStrike" cap="none" normalizeH="0" baseline="0">
+                <a:ln>
+                  <a:noFill/>
+                </a:ln>
+                <a:solidFill>
+                  <a:schemeClr val="tx1"/>
+                </a:solidFill>
+                <a:effectLst/>
+                <a:latin typeface="Arial" panose="020B0604020202020204" pitchFamily="34" charset="0"/>
+              </a:rPr>
+              <a:t>Əgər </a:t>
+            </a:r>
+            <a:r>
+              <a:rPr kumimoji="0" lang="en-US" altLang="en-US" sz="1300" b="1" i="0" u="none" strike="noStrike" cap="none" normalizeH="0" baseline="0">
+                <a:ln>
+                  <a:noFill/>
+                </a:ln>
+                <a:solidFill>
+                  <a:schemeClr val="tx1"/>
+                </a:solidFill>
+                <a:effectLst/>
+                <a:latin typeface="Arial" panose="020B0604020202020204" pitchFamily="34" charset="0"/>
+              </a:rPr>
+              <a:t>JavaScript</a:t>
+            </a:r>
+            <a:r>
+              <a:rPr kumimoji="0" lang="en-US" altLang="en-US" sz="1300" b="0" i="0" u="none" strike="noStrike" cap="none" normalizeH="0" baseline="0">
+                <a:ln>
+                  <a:noFill/>
+                </a:ln>
+                <a:solidFill>
+                  <a:schemeClr val="tx1"/>
+                </a:solidFill>
+                <a:effectLst/>
+                <a:latin typeface="Arial" panose="020B0604020202020204" pitchFamily="34" charset="0"/>
+              </a:rPr>
+              <a:t> ilə </a:t>
+            </a:r>
+            <a:r>
+              <a:rPr kumimoji="0" lang="en-US" altLang="en-US" sz="1300" b="1" i="0" u="none" strike="noStrike" cap="none" normalizeH="0" baseline="0">
+                <a:ln>
+                  <a:noFill/>
+                </a:ln>
+                <a:solidFill>
+                  <a:schemeClr val="tx1"/>
+                </a:solidFill>
+                <a:effectLst/>
+                <a:latin typeface="Arial" panose="020B0604020202020204" pitchFamily="34" charset="0"/>
+              </a:rPr>
+              <a:t>a</a:t>
+            </a:r>
+            <a:r>
+              <a:rPr kumimoji="0" lang="en-US" altLang="en-US" sz="1300" b="0" i="0" u="none" strike="noStrike" cap="none" normalizeH="0" baseline="0">
+                <a:ln>
+                  <a:noFill/>
+                </a:ln>
+                <a:solidFill>
+                  <a:schemeClr val="tx1"/>
+                </a:solidFill>
+                <a:effectLst/>
+                <a:latin typeface="Arial" panose="020B0604020202020204" pitchFamily="34" charset="0"/>
+              </a:rPr>
+              <a:t> tagından istifadə etmək istəsən: Bu, </a:t>
+            </a:r>
+            <a:r>
+              <a:rPr kumimoji="0" lang="en-US" altLang="en-US" sz="1300" b="1" strike="noStrike" cap="none" normalizeH="0" baseline="0">
+                <a:ln>
+                  <a:noFill/>
+                </a:ln>
+                <a:solidFill>
+                  <a:schemeClr val="tx1"/>
+                </a:solidFill>
+                <a:effectLst/>
+                <a:latin typeface="Arial" panose="020B0604020202020204" pitchFamily="34" charset="0"/>
+              </a:rPr>
+              <a:t>a</a:t>
+            </a:r>
+            <a:r>
+              <a:rPr kumimoji="0" lang="en-US" altLang="en-US" sz="1300" b="0" i="0" u="none" strike="noStrike" cap="none" normalizeH="0" baseline="0">
+                <a:ln>
+                  <a:noFill/>
+                </a:ln>
+                <a:solidFill>
+                  <a:schemeClr val="tx1"/>
+                </a:solidFill>
+                <a:effectLst/>
+                <a:latin typeface="Arial" panose="020B0604020202020204" pitchFamily="34" charset="0"/>
+              </a:rPr>
+              <a:t> tagını kliklədikdə JS ilə </a:t>
+            </a:r>
+            <a:r>
+              <a:rPr kumimoji="0" lang="en-US" altLang="en-US" sz="1300" b="1" i="0" u="none" strike="noStrike" cap="none" normalizeH="0" baseline="0">
+                <a:ln>
+                  <a:noFill/>
+                </a:ln>
+                <a:solidFill>
+                  <a:schemeClr val="tx1"/>
+                </a:solidFill>
+                <a:effectLst/>
+                <a:latin typeface="Arial" panose="020B0604020202020204" pitchFamily="34" charset="0"/>
+              </a:rPr>
+              <a:t>form.submit() </a:t>
+            </a:r>
+            <a:r>
+              <a:rPr kumimoji="0" lang="en-US" altLang="en-US" sz="1300" b="0" i="0" u="none" strike="noStrike" cap="none" normalizeH="0" baseline="0">
+                <a:ln>
+                  <a:noFill/>
+                </a:ln>
+                <a:solidFill>
+                  <a:schemeClr val="tx1"/>
+                </a:solidFill>
+                <a:effectLst/>
+                <a:latin typeface="Arial" panose="020B0604020202020204" pitchFamily="34" charset="0"/>
+              </a:rPr>
+              <a:t>işlədərək </a:t>
+            </a:r>
+            <a:r>
+              <a:rPr kumimoji="0" lang="en-US" altLang="en-US" sz="1300" b="1" i="0" u="none" strike="noStrike" cap="none" normalizeH="0" baseline="0">
+                <a:ln>
+                  <a:noFill/>
+                </a:ln>
+                <a:solidFill>
+                  <a:schemeClr val="tx1"/>
+                </a:solidFill>
+                <a:effectLst/>
+                <a:latin typeface="Arial" panose="020B0604020202020204" pitchFamily="34" charset="0"/>
+              </a:rPr>
+              <a:t>DELETE</a:t>
+            </a:r>
+            <a:r>
+              <a:rPr kumimoji="0" lang="en-US" altLang="en-US" sz="1300" b="0" i="0" u="none" strike="noStrike" cap="none" normalizeH="0" baseline="0">
+                <a:ln>
+                  <a:noFill/>
+                </a:ln>
+                <a:solidFill>
+                  <a:schemeClr val="tx1"/>
+                </a:solidFill>
+                <a:effectLst/>
+                <a:latin typeface="Arial" panose="020B0604020202020204" pitchFamily="34" charset="0"/>
+              </a:rPr>
+              <a:t> edir. Amma yenə də </a:t>
+            </a:r>
+            <a:r>
+              <a:rPr kumimoji="0" lang="en-US" altLang="en-US" sz="1300" b="1" i="0" u="none" strike="noStrike" cap="none" normalizeH="0" baseline="0">
+                <a:ln>
+                  <a:noFill/>
+                </a:ln>
+                <a:solidFill>
+                  <a:schemeClr val="tx1"/>
+                </a:solidFill>
+                <a:effectLst/>
+                <a:latin typeface="Arial" panose="020B0604020202020204" pitchFamily="34" charset="0"/>
+              </a:rPr>
+              <a:t>form</a:t>
+            </a:r>
+            <a:r>
+              <a:rPr kumimoji="0" lang="en-US" altLang="en-US" sz="1300" b="0" i="0" u="none" strike="noStrike" cap="none" normalizeH="0" baseline="0">
+                <a:ln>
+                  <a:noFill/>
+                </a:ln>
+                <a:solidFill>
+                  <a:schemeClr val="tx1"/>
+                </a:solidFill>
+                <a:effectLst/>
+                <a:latin typeface="Arial" panose="020B0604020202020204" pitchFamily="34" charset="0"/>
+              </a:rPr>
+              <a:t>-a ehtiyac qalır (biz bunu istifad</a:t>
+            </a:r>
+            <a:r>
+              <a:rPr kumimoji="0" lang="az-Latn-AZ" altLang="en-US" sz="1300" b="0" i="0" u="none" strike="noStrike" cap="none" normalizeH="0" baseline="0">
+                <a:ln>
+                  <a:noFill/>
+                </a:ln>
+                <a:solidFill>
+                  <a:schemeClr val="tx1"/>
+                </a:solidFill>
+                <a:effectLst/>
+                <a:latin typeface="Arial" panose="020B0604020202020204" pitchFamily="34" charset="0"/>
+              </a:rPr>
+              <a:t>ə etmiyəcəyik. Yazdım ki, sadəcə bilinki belə bir şey var</a:t>
+            </a:r>
+            <a:r>
+              <a:rPr kumimoji="0" lang="en-US" altLang="en-US" sz="1300" b="0" i="0" u="none" strike="noStrike" cap="none" normalizeH="0" baseline="0">
+                <a:ln>
+                  <a:noFill/>
+                </a:ln>
+                <a:solidFill>
+                  <a:schemeClr val="tx1"/>
+                </a:solidFill>
+                <a:effectLst/>
+                <a:latin typeface="Arial" panose="020B0604020202020204" pitchFamily="34" charset="0"/>
+              </a:rPr>
+              <a:t>).</a:t>
+            </a:r>
+          </a:p>
+        </p:txBody>
+      </p:sp>
+      <p:pic>
+        <p:nvPicPr>
+          <p:cNvPr id="4" name="Picture 3">
+            <a:extLst>
+              <a:ext uri="{FF2B5EF4-FFF2-40B4-BE49-F238E27FC236}">
+                <a16:creationId xmlns:a16="http://schemas.microsoft.com/office/drawing/2014/main" id="{C913D902-9362-A1C4-1811-4D45E5232523}"/>
+              </a:ext>
+            </a:extLst>
+          </p:cNvPr>
+          <p:cNvPicPr>
+            <a:picLocks noChangeAspect="1"/>
+          </p:cNvPicPr>
+          <p:nvPr/>
+        </p:nvPicPr>
+        <p:blipFill>
+          <a:blip r:embed="rId2"/>
+          <a:stretch>
+            <a:fillRect/>
+          </a:stretch>
+        </p:blipFill>
+        <p:spPr>
+          <a:xfrm>
+            <a:off x="217714" y="3429000"/>
+            <a:ext cx="9469171" cy="1581371"/>
+          </a:xfrm>
+          <a:prstGeom prst="rect">
+            <a:avLst/>
+          </a:prstGeom>
+        </p:spPr>
+      </p:pic>
     </p:spTree>
     <p:extLst>
       <p:ext uri="{BB962C8B-B14F-4D97-AF65-F5344CB8AC3E}">
@@ -3542,21 +4781,44 @@
               <a:buNone/>
             </a:pPr>
             <a:r>
-              <a:rPr kumimoji="0" lang="en-US" altLang="en-US" sz="1300" b="0" i="0" u="none" strike="noStrike" cap="none" normalizeH="0" baseline="0">
-                <a:ln>
-                  <a:noFill/>
-                </a:ln>
-                <a:solidFill>
-                  <a:schemeClr val="tx1"/>
-                </a:solidFill>
-                <a:effectLst/>
-                <a:latin typeface="Arial" panose="020B0604020202020204" pitchFamily="34" charset="0"/>
-              </a:rPr>
-              <a:t>.</a:t>
-            </a:r>
-          </a:p>
-        </p:txBody>
-      </p:sp>
+              <a:rPr lang="az-Latn-AZ" altLang="en-US" sz="1300">
+                <a:latin typeface="Arial" panose="020B0604020202020204" pitchFamily="34" charset="0"/>
+              </a:rPr>
+              <a:t>Delete üçün controller belə yazılır. </a:t>
+            </a:r>
+          </a:p>
+        </p:txBody>
+      </p:sp>
+      <p:pic>
+        <p:nvPicPr>
+          <p:cNvPr id="4" name="Picture 3">
+            <a:extLst>
+              <a:ext uri="{FF2B5EF4-FFF2-40B4-BE49-F238E27FC236}">
+                <a16:creationId xmlns:a16="http://schemas.microsoft.com/office/drawing/2014/main" id="{1F6C516A-227A-FF29-FE2D-6933EAF1173C}"/>
+              </a:ext>
+            </a:extLst>
+          </p:cNvPr>
+          <p:cNvPicPr>
+            <a:picLocks noChangeAspect="1"/>
+          </p:cNvPicPr>
+          <p:nvPr/>
+        </p:nvPicPr>
+        <p:blipFill>
+          <a:blip r:embed="rId2"/>
+          <a:stretch>
+            <a:fillRect/>
+          </a:stretch>
+        </p:blipFill>
+        <p:spPr>
+          <a:xfrm>
+            <a:off x="7192631" y="0"/>
+            <a:ext cx="4999369" cy="6858000"/>
+          </a:xfrm>
+          <a:prstGeom prst="rect">
+            <a:avLst/>
+          </a:prstGeom>
+        </p:spPr>
+      </p:pic>
     </p:spTree>
     <p:extLst>
       <p:ext uri="{BB962C8B-B14F-4D97-AF65-F5344CB8AC3E}">
@@ -3628,6 +4890,44 @@
               <a:buNone/>
             </a:pPr>
             <a:r>
+              <a:rPr lang="az-Latn-AZ" altLang="en-US" sz="1300" b="1">
+                <a:latin typeface="Arial" panose="020B0604020202020204" pitchFamily="34" charset="0"/>
+              </a:rPr>
+              <a:t>Delete</a:t>
+            </a:r>
+            <a:r>
+              <a:rPr lang="az-Latn-AZ" altLang="en-US" sz="1300">
+                <a:latin typeface="Arial" panose="020B0604020202020204" pitchFamily="34" charset="0"/>
+              </a:rPr>
+              <a:t> əməliyyatında, məlumat DB-dəki cədvəldən silinir, ancaq şəkil </a:t>
+            </a:r>
+            <a:r>
+              <a:rPr kumimoji="0" lang="az-Latn-AZ" altLang="en-US" sz="1300" b="1" i="0" u="none" strike="noStrike" cap="none" normalizeH="0" baseline="0">
+                <a:ln>
+                  <a:noFill/>
+                </a:ln>
+                <a:solidFill>
+                  <a:srgbClr val="0070C0"/>
+                </a:solidFill>
+                <a:effectLst/>
+                <a:latin typeface="Arial" panose="020B0604020202020204" pitchFamily="34" charset="0"/>
+              </a:rPr>
+              <a:t>storage</a:t>
+            </a:r>
+            <a:r>
+              <a:rPr kumimoji="0" lang="az-Latn-AZ" altLang="en-US" sz="1300" b="0" i="0" u="none" strike="noStrike" cap="none" normalizeH="0" baseline="0">
+                <a:ln>
+                  <a:noFill/>
+                </a:ln>
+                <a:solidFill>
+                  <a:schemeClr val="tx1"/>
+                </a:solidFill>
+                <a:effectLst/>
+                <a:latin typeface="Arial" panose="020B0604020202020204" pitchFamily="34" charset="0"/>
+              </a:rPr>
+              <a:t> qovluğunda qalır. </a:t>
+            </a:r>
+            <a:r>
               <a:rPr kumimoji="0" lang="en-US" altLang="en-US" sz="1300" b="0" i="0" u="none" strike="noStrike" cap="none" normalizeH="0" baseline="0">
                 <a:ln>
                   <a:noFill/>
@@ -3638,15 +4938,714 @@
                 <a:effectLst/>
                 <a:latin typeface="Arial" panose="020B0604020202020204" pitchFamily="34" charset="0"/>
               </a:rPr>
-              <a:t>.</a:t>
-            </a:r>
-          </a:p>
-        </p:txBody>
-      </p:sp>
+              <a:t> </a:t>
+            </a:r>
+            <a:r>
+              <a:rPr lang="az-Latn-AZ" altLang="en-US" sz="1300">
+                <a:latin typeface="Arial" panose="020B0604020202020204" pitchFamily="34" charset="0"/>
+              </a:rPr>
+              <a:t>Storage -dən necə silindiyini görmüşük. Növbəti slayd....</a:t>
+            </a:r>
+            <a:endParaRPr kumimoji="0" lang="en-US" altLang="en-US" sz="1300" b="0" i="0" u="none" strike="noStrike" cap="none" normalizeH="0" baseline="0">
+              <a:ln>
+                <a:noFill/>
+              </a:ln>
+              <a:solidFill>
+                <a:schemeClr val="tx1"/>
+              </a:solidFill>
+              <a:effectLst/>
+              <a:latin typeface="Arial" panose="020B0604020202020204" pitchFamily="34" charset="0"/>
+            </a:endParaRPr>
+          </a:p>
+        </p:txBody>
+      </p:sp>
+      <p:pic>
+        <p:nvPicPr>
+          <p:cNvPr id="4" name="Picture 3">
+            <a:extLst>
+              <a:ext uri="{FF2B5EF4-FFF2-40B4-BE49-F238E27FC236}">
+                <a16:creationId xmlns:a16="http://schemas.microsoft.com/office/drawing/2014/main" id="{447E4D5C-5106-A061-F0FC-2717003C81FE}"/>
+              </a:ext>
+            </a:extLst>
+          </p:cNvPr>
+          <p:cNvPicPr>
+            <a:picLocks noChangeAspect="1"/>
+          </p:cNvPicPr>
+          <p:nvPr/>
+        </p:nvPicPr>
+        <p:blipFill>
+          <a:blip r:embed="rId2"/>
+          <a:stretch>
+            <a:fillRect/>
+          </a:stretch>
+        </p:blipFill>
+        <p:spPr>
+          <a:xfrm>
+            <a:off x="980388" y="1036816"/>
+            <a:ext cx="11211612" cy="5821184"/>
+          </a:xfrm>
+          <a:prstGeom prst="rect">
+            <a:avLst/>
+          </a:prstGeom>
+        </p:spPr>
+      </p:pic>
     </p:spTree>
     <p:extLst>
       <p:ext uri="{BB962C8B-B14F-4D97-AF65-F5344CB8AC3E}">
         <p14:creationId xmlns:p14="http://schemas.microsoft.com/office/powerpoint/2010/main" val="3095838342"/>
+      </p:ext>
+    </p:extLst>
+  </p:cSld>
+  <p:clrMapOvr>
+    <a:masterClrMapping/>
+  </p:clrMapOvr>
+</p:sld>
+</file>
+
+<file path=ppt/slides/slide5.xml><?xml version="1.0" encoding="utf-8"?>
+<p:sld xmlns:a="http://schemas.openxmlformats.org/drawingml/2006/main" xmlns:r="http://schemas.openxmlformats.org/officeDocument/2006/relationships" xmlns:p="http://schemas.openxmlformats.org/presentationml/2006/main">
+  <p:cSld>
+    <p:spTree>
+      <p:nvGrpSpPr>
+        <p:cNvPr id="1" name="">
+          <a:extLst>
+            <a:ext uri="{FF2B5EF4-FFF2-40B4-BE49-F238E27FC236}">
+              <a16:creationId xmlns:a16="http://schemas.microsoft.com/office/drawing/2014/main" id="{0579DA40-AB8B-8D7C-09A3-DC497CAA40E4}"/>
+            </a:ext>
+          </a:extLst>
+        </p:cNvPr>
+        <p:cNvGrpSpPr/>
+        <p:nvPr/>
+      </p:nvGrpSpPr>
+      <p:grpSpPr>
+        <a:xfrm>
+          <a:off x="0" y="0"/>
+          <a:ext cx="0" cy="0"/>
+          <a:chOff x="0" y="0"/>
+          <a:chExt cx="0" cy="0"/>
+        </a:xfrm>
+      </p:grpSpPr>
+      <p:sp>
+        <p:nvSpPr>
+          <p:cNvPr id="3" name="TextBox 2">
+            <a:extLst>
+              <a:ext uri="{FF2B5EF4-FFF2-40B4-BE49-F238E27FC236}">
+                <a16:creationId xmlns:a16="http://schemas.microsoft.com/office/drawing/2014/main" id="{DD1C2363-2D5D-1770-A1BB-C89A0F3051C1}"/>
+              </a:ext>
+            </a:extLst>
+          </p:cNvPr>
+          <p:cNvSpPr txBox="1"/>
+          <p:nvPr/>
+        </p:nvSpPr>
+        <p:spPr>
+          <a:xfrm>
+            <a:off x="217714" y="255046"/>
+            <a:ext cx="11756571" cy="4556504"/>
+          </a:xfrm>
+          <a:prstGeom prst="rect">
+            <a:avLst/>
+          </a:prstGeom>
+          <a:noFill/>
+        </p:spPr>
+        <p:txBody>
+          <a:bodyPr wrap="square">
+            <a:spAutoFit/>
+          </a:bodyPr>
+          <a:lstStyle/>
+          <a:p>
+            <a:pPr>
+              <a:lnSpc>
+                <a:spcPct val="150000"/>
+              </a:lnSpc>
+              <a:buNone/>
+            </a:pPr>
+            <a:r>
+              <a:rPr lang="az-Latn-AZ" altLang="en-US" sz="1300">
+                <a:latin typeface="Arial" panose="020B0604020202020204" pitchFamily="34" charset="0"/>
+              </a:rPr>
+              <a:t>Ən sadə şəkildə `</a:t>
+            </a:r>
+            <a:r>
+              <a:rPr lang="az-Latn-AZ" altLang="en-US" sz="1300" b="1">
+                <a:solidFill>
+                  <a:srgbClr val="0070C0"/>
+                </a:solidFill>
+                <a:latin typeface="Arial" panose="020B0604020202020204" pitchFamily="34" charset="0"/>
+              </a:rPr>
+              <a:t>File</a:t>
+            </a:r>
+            <a:r>
+              <a:rPr lang="az-Latn-AZ" altLang="en-US" sz="1300" b="1">
+                <a:solidFill>
+                  <a:srgbClr val="FF0000"/>
+                </a:solidFill>
+                <a:latin typeface="Arial" panose="020B0604020202020204" pitchFamily="34" charset="0"/>
+              </a:rPr>
+              <a:t>::</a:t>
+            </a:r>
+            <a:r>
+              <a:rPr lang="az-Latn-AZ" altLang="en-US" sz="1300" b="1">
+                <a:solidFill>
+                  <a:srgbClr val="00B050"/>
+                </a:solidFill>
+                <a:latin typeface="Arial" panose="020B0604020202020204" pitchFamily="34" charset="0"/>
+              </a:rPr>
+              <a:t>delete</a:t>
+            </a:r>
+            <a:r>
+              <a:rPr lang="az-Latn-AZ" altLang="en-US" sz="1300" b="1">
+                <a:solidFill>
+                  <a:schemeClr val="accent1">
+                    <a:lumMod val="75000"/>
+                  </a:schemeClr>
+                </a:solidFill>
+                <a:latin typeface="Arial" panose="020B0604020202020204" pitchFamily="34" charset="0"/>
+              </a:rPr>
+              <a:t>(</a:t>
+            </a:r>
+            <a:r>
+              <a:rPr lang="az-Latn-AZ" altLang="en-US" sz="1300" b="1">
+                <a:solidFill>
+                  <a:srgbClr val="00B050"/>
+                </a:solidFill>
+                <a:latin typeface="Arial" panose="020B0604020202020204" pitchFamily="34" charset="0"/>
+              </a:rPr>
+              <a:t>public_path</a:t>
+            </a:r>
+            <a:r>
+              <a:rPr lang="az-Latn-AZ" altLang="en-US" sz="1300" b="1">
+                <a:solidFill>
+                  <a:schemeClr val="accent4"/>
+                </a:solidFill>
+                <a:latin typeface="Arial" panose="020B0604020202020204" pitchFamily="34" charset="0"/>
+              </a:rPr>
+              <a:t>(</a:t>
+            </a:r>
+            <a:r>
+              <a:rPr lang="az-Latn-AZ" altLang="en-US" sz="1300" b="1">
+                <a:latin typeface="Arial" panose="020B0604020202020204" pitchFamily="34" charset="0"/>
+              </a:rPr>
+              <a:t>$post</a:t>
+            </a:r>
+            <a:r>
+              <a:rPr lang="az-Latn-AZ" altLang="en-US" sz="1300" b="1">
+                <a:solidFill>
+                  <a:srgbClr val="FF0000"/>
+                </a:solidFill>
+                <a:latin typeface="Arial" panose="020B0604020202020204" pitchFamily="34" charset="0"/>
+              </a:rPr>
+              <a:t>-&gt;</a:t>
+            </a:r>
+            <a:r>
+              <a:rPr lang="az-Latn-AZ" altLang="en-US" sz="1300" b="1">
+                <a:latin typeface="Arial" panose="020B0604020202020204" pitchFamily="34" charset="0"/>
+              </a:rPr>
+              <a:t>image</a:t>
+            </a:r>
+            <a:r>
+              <a:rPr lang="az-Latn-AZ" altLang="en-US" sz="1300" b="1">
+                <a:solidFill>
+                  <a:schemeClr val="accent4"/>
+                </a:solidFill>
+                <a:latin typeface="Arial" panose="020B0604020202020204" pitchFamily="34" charset="0"/>
+              </a:rPr>
+              <a:t>)</a:t>
+            </a:r>
+            <a:r>
+              <a:rPr lang="az-Latn-AZ" altLang="en-US" sz="1300" b="1">
+                <a:solidFill>
+                  <a:schemeClr val="accent1">
+                    <a:lumMod val="75000"/>
+                  </a:schemeClr>
+                </a:solidFill>
+                <a:latin typeface="Arial" panose="020B0604020202020204" pitchFamily="34" charset="0"/>
+              </a:rPr>
+              <a:t>)</a:t>
+            </a:r>
+            <a:r>
+              <a:rPr lang="az-Latn-AZ" altLang="en-US" sz="1300" b="1">
+                <a:latin typeface="Arial" panose="020B0604020202020204" pitchFamily="34" charset="0"/>
+              </a:rPr>
+              <a:t>;</a:t>
+            </a:r>
+            <a:r>
+              <a:rPr lang="az-Latn-AZ" altLang="en-US" sz="1300">
+                <a:latin typeface="Arial" panose="020B0604020202020204" pitchFamily="34" charset="0"/>
+              </a:rPr>
+              <a:t>` əmrini əlavə etmək kifayətdir.  </a:t>
+            </a:r>
+          </a:p>
+          <a:p>
+            <a:pPr>
+              <a:lnSpc>
+                <a:spcPct val="150000"/>
+              </a:lnSpc>
+              <a:buNone/>
+            </a:pPr>
+            <a:endParaRPr lang="az-Latn-AZ" altLang="en-US" sz="1300">
+              <a:latin typeface="Arial" panose="020B0604020202020204" pitchFamily="34" charset="0"/>
+            </a:endParaRPr>
+          </a:p>
+          <a:p>
+            <a:pPr>
+              <a:lnSpc>
+                <a:spcPct val="150000"/>
+              </a:lnSpc>
+              <a:buNone/>
+            </a:pPr>
+            <a:endParaRPr lang="en-US" altLang="en-US" sz="1300">
+              <a:latin typeface="Arial" panose="020B0604020202020204" pitchFamily="34" charset="0"/>
+            </a:endParaRPr>
+          </a:p>
+          <a:p>
+            <a:pPr>
+              <a:lnSpc>
+                <a:spcPct val="150000"/>
+              </a:lnSpc>
+              <a:buNone/>
+            </a:pPr>
+            <a:r>
+              <a:rPr kumimoji="0" lang="en-US" altLang="en-US" sz="1300" b="0" i="0" u="none" strike="noStrike" cap="none" normalizeH="0" baseline="0">
+                <a:ln>
+                  <a:noFill/>
+                </a:ln>
+                <a:solidFill>
+                  <a:schemeClr val="tx1"/>
+                </a:solidFill>
+                <a:effectLst/>
+                <a:latin typeface="Arial" panose="020B0604020202020204" pitchFamily="34" charset="0"/>
+              </a:rPr>
+              <a:t>Ancaq biz bunu etmi</a:t>
+            </a:r>
+            <a:r>
+              <a:rPr kumimoji="0" lang="az-Latn-AZ" altLang="en-US" sz="1300" b="0" i="0" u="none" strike="noStrike" cap="none" normalizeH="0" baseline="0">
+                <a:ln>
+                  <a:noFill/>
+                </a:ln>
+                <a:solidFill>
+                  <a:schemeClr val="tx1"/>
+                </a:solidFill>
+                <a:effectLst/>
+                <a:latin typeface="Arial" panose="020B0604020202020204" pitchFamily="34" charset="0"/>
+              </a:rPr>
+              <a:t>yəcəyik bu proyektdə. Çünki bizim </a:t>
+            </a:r>
+            <a:r>
+              <a:rPr kumimoji="0" lang="az-Latn-AZ" altLang="en-US" sz="1300" b="1" i="0" u="none" strike="noStrike" cap="none" normalizeH="0" baseline="0">
+                <a:ln>
+                  <a:noFill/>
+                </a:ln>
+                <a:solidFill>
+                  <a:srgbClr val="FF0000"/>
+                </a:solidFill>
+                <a:effectLst/>
+                <a:latin typeface="Arial" panose="020B0604020202020204" pitchFamily="34" charset="0"/>
+              </a:rPr>
+              <a:t>Trashed</a:t>
+            </a:r>
+            <a:r>
+              <a:rPr kumimoji="0" lang="az-Latn-AZ" altLang="en-US" sz="1300" b="0" i="0" u="none" strike="noStrike" cap="none" normalizeH="0" baseline="0">
+                <a:ln>
+                  <a:noFill/>
+                </a:ln>
+                <a:solidFill>
+                  <a:schemeClr val="tx1"/>
+                </a:solidFill>
+                <a:effectLst/>
+                <a:latin typeface="Arial" panose="020B0604020202020204" pitchFamily="34" charset="0"/>
+              </a:rPr>
+              <a:t> adında </a:t>
+            </a:r>
+          </a:p>
+          <a:p>
+            <a:pPr>
+              <a:lnSpc>
+                <a:spcPct val="150000"/>
+              </a:lnSpc>
+              <a:buNone/>
+            </a:pPr>
+            <a:r>
+              <a:rPr lang="az-Latn-AZ" altLang="en-US" sz="1300">
+                <a:latin typeface="Arial" panose="020B0604020202020204" pitchFamily="34" charset="0"/>
+              </a:rPr>
+              <a:t>şablonumuz olacaq ki, silinən məhsullar zibil qabına yığılsın. Və istədiyimiz</a:t>
+            </a:r>
+          </a:p>
+          <a:p>
+            <a:pPr>
+              <a:lnSpc>
+                <a:spcPct val="150000"/>
+              </a:lnSpc>
+              <a:buNone/>
+            </a:pPr>
+            <a:r>
+              <a:rPr kumimoji="0" lang="az-Latn-AZ" altLang="en-US" sz="1300" b="0" i="0" u="none" strike="noStrike" cap="none" normalizeH="0" baseline="0">
+                <a:ln>
+                  <a:noFill/>
+                </a:ln>
+                <a:solidFill>
+                  <a:schemeClr val="tx1"/>
+                </a:solidFill>
+                <a:effectLst/>
+                <a:latin typeface="Arial" panose="020B0604020202020204" pitchFamily="34" charset="0"/>
+              </a:rPr>
+              <a:t>zaman geri bərpa edək. Əgər </a:t>
+            </a:r>
+            <a:r>
+              <a:rPr kumimoji="0" lang="az-Latn-AZ" altLang="en-US" sz="1300" b="1" i="0" u="none" strike="noStrike" cap="none" normalizeH="0" baseline="0">
+                <a:ln>
+                  <a:noFill/>
+                </a:ln>
+                <a:solidFill>
+                  <a:schemeClr val="tx1"/>
+                </a:solidFill>
+                <a:effectLst/>
+                <a:latin typeface="Arial" panose="020B0604020202020204" pitchFamily="34" charset="0"/>
+              </a:rPr>
+              <a:t>Storage</a:t>
+            </a:r>
+            <a:r>
+              <a:rPr kumimoji="0" lang="az-Latn-AZ" altLang="en-US" sz="1300" b="0" i="0" u="none" strike="noStrike" cap="none" normalizeH="0" baseline="0">
+                <a:ln>
+                  <a:noFill/>
+                </a:ln>
+                <a:solidFill>
+                  <a:schemeClr val="tx1"/>
+                </a:solidFill>
+                <a:effectLst/>
+                <a:latin typeface="Arial" panose="020B0604020202020204" pitchFamily="34" charset="0"/>
+              </a:rPr>
+              <a:t> qovluğundan faylı silsək onda faylı</a:t>
+            </a:r>
+          </a:p>
+          <a:p>
+            <a:pPr>
+              <a:lnSpc>
+                <a:spcPct val="150000"/>
+              </a:lnSpc>
+              <a:buNone/>
+            </a:pPr>
+            <a:r>
+              <a:rPr lang="az-Latn-AZ" altLang="en-US" sz="1300">
+                <a:latin typeface="Arial" panose="020B0604020202020204" pitchFamily="34" charset="0"/>
+              </a:rPr>
+              <a:t>bərpa etdiyimiz zaman əsas şablonda həmin faylı ( yəni şəkli ) görməyəcəyik. </a:t>
+            </a:r>
+          </a:p>
+          <a:p>
+            <a:pPr>
+              <a:lnSpc>
+                <a:spcPct val="150000"/>
+              </a:lnSpc>
+              <a:buNone/>
+            </a:pPr>
+            <a:endParaRPr kumimoji="0" lang="az-Latn-AZ" altLang="en-US" sz="1300" b="0" i="0" u="none" strike="noStrike" cap="none" normalizeH="0" baseline="0">
+              <a:ln>
+                <a:noFill/>
+              </a:ln>
+              <a:solidFill>
+                <a:schemeClr val="tx1"/>
+              </a:solidFill>
+              <a:effectLst/>
+              <a:latin typeface="Arial" panose="020B0604020202020204" pitchFamily="34" charset="0"/>
+            </a:endParaRPr>
+          </a:p>
+          <a:p>
+            <a:pPr>
+              <a:lnSpc>
+                <a:spcPct val="150000"/>
+              </a:lnSpc>
+              <a:buNone/>
+            </a:pPr>
+            <a:r>
+              <a:rPr lang="az-Latn-AZ" altLang="en-US" sz="1300" b="1">
+                <a:latin typeface="Arial" panose="020B0604020202020204" pitchFamily="34" charset="0"/>
+              </a:rPr>
+              <a:t>Trashed</a:t>
+            </a:r>
+            <a:r>
+              <a:rPr lang="az-Latn-AZ" altLang="en-US" sz="1300">
+                <a:latin typeface="Arial" panose="020B0604020202020204" pitchFamily="34" charset="0"/>
+              </a:rPr>
+              <a:t> şablonu üçün isə </a:t>
+            </a:r>
+            <a:r>
+              <a:rPr lang="az-Latn-AZ" altLang="en-US" sz="1300" b="1">
+                <a:solidFill>
+                  <a:srgbClr val="7030A0"/>
+                </a:solidFill>
+                <a:latin typeface="Arial" panose="020B0604020202020204" pitchFamily="34" charset="0"/>
+              </a:rPr>
+              <a:t>softDelete</a:t>
+            </a:r>
+            <a:r>
+              <a:rPr lang="az-Latn-AZ" altLang="en-US" sz="1300">
+                <a:latin typeface="Arial" panose="020B0604020202020204" pitchFamily="34" charset="0"/>
+              </a:rPr>
+              <a:t> xüsusiyyətindən istifadə edəcəyik. </a:t>
+            </a:r>
+          </a:p>
+          <a:p>
+            <a:pPr>
+              <a:lnSpc>
+                <a:spcPct val="150000"/>
+              </a:lnSpc>
+              <a:buNone/>
+            </a:pPr>
+            <a:r>
+              <a:rPr kumimoji="0" lang="az-Latn-AZ" altLang="en-US" sz="1300" b="0" i="0" u="none" strike="noStrike" cap="none" normalizeH="0" baseline="0">
+                <a:ln>
+                  <a:noFill/>
+                </a:ln>
+                <a:solidFill>
+                  <a:schemeClr val="tx1"/>
+                </a:solidFill>
+                <a:effectLst/>
+                <a:latin typeface="Arial" panose="020B0604020202020204" pitchFamily="34" charset="0"/>
+              </a:rPr>
+              <a:t>Növbəti dərs......</a:t>
+            </a:r>
+          </a:p>
+          <a:p>
+            <a:pPr>
+              <a:lnSpc>
+                <a:spcPct val="150000"/>
+              </a:lnSpc>
+              <a:buNone/>
+            </a:pPr>
+            <a:endParaRPr lang="az-Latn-AZ" altLang="en-US" sz="1300">
+              <a:latin typeface="Arial" panose="020B0604020202020204" pitchFamily="34" charset="0"/>
+            </a:endParaRPr>
+          </a:p>
+          <a:p>
+            <a:pPr>
+              <a:lnSpc>
+                <a:spcPct val="150000"/>
+              </a:lnSpc>
+              <a:buNone/>
+            </a:pPr>
+            <a:endParaRPr kumimoji="0" lang="az-Latn-AZ" altLang="en-US" sz="1300" b="0" i="0" u="none" strike="noStrike" cap="none" normalizeH="0" baseline="0">
+              <a:ln>
+                <a:noFill/>
+              </a:ln>
+              <a:solidFill>
+                <a:schemeClr val="tx1"/>
+              </a:solidFill>
+              <a:effectLst/>
+              <a:latin typeface="Arial" panose="020B0604020202020204" pitchFamily="34" charset="0"/>
+            </a:endParaRPr>
+          </a:p>
+          <a:p>
+            <a:pPr>
+              <a:lnSpc>
+                <a:spcPct val="150000"/>
+              </a:lnSpc>
+              <a:buNone/>
+            </a:pPr>
+            <a:endParaRPr lang="az-Latn-AZ" altLang="en-US" sz="1300">
+              <a:latin typeface="Arial" panose="020B0604020202020204" pitchFamily="34" charset="0"/>
+            </a:endParaRPr>
+          </a:p>
+          <a:p>
+            <a:pPr>
+              <a:lnSpc>
+                <a:spcPct val="150000"/>
+              </a:lnSpc>
+              <a:buNone/>
+            </a:pPr>
+            <a:r>
+              <a:rPr kumimoji="0" lang="az-Latn-AZ" altLang="en-US" sz="1300" b="1" i="0" u="none" strike="noStrike" cap="none" normalizeH="0" baseline="0">
+                <a:ln>
+                  <a:noFill/>
+                </a:ln>
+                <a:solidFill>
+                  <a:schemeClr val="tx1"/>
+                </a:solidFill>
+                <a:effectLst/>
+                <a:latin typeface="Arial" panose="020B0604020202020204" pitchFamily="34" charset="0"/>
+              </a:rPr>
+              <a:t>QEYD</a:t>
+            </a:r>
+            <a:r>
+              <a:rPr kumimoji="0" lang="az-Latn-AZ" altLang="en-US" sz="1300" b="0" i="0" u="none" strike="noStrike" cap="none" normalizeH="0" baseline="0">
+                <a:ln>
+                  <a:noFill/>
+                </a:ln>
+                <a:solidFill>
+                  <a:schemeClr val="tx1"/>
+                </a:solidFill>
+                <a:effectLst/>
+                <a:latin typeface="Arial" panose="020B0604020202020204" pitchFamily="34" charset="0"/>
+              </a:rPr>
+              <a:t>: </a:t>
+            </a:r>
+            <a:r>
+              <a:rPr kumimoji="0" lang="az-Latn-AZ" altLang="en-US" sz="1300" b="1" i="0" u="none" strike="noStrike" cap="none" normalizeH="0" baseline="0">
+                <a:ln>
+                  <a:noFill/>
+                </a:ln>
+                <a:solidFill>
+                  <a:schemeClr val="tx1"/>
+                </a:solidFill>
+                <a:effectLst/>
+                <a:latin typeface="Arial" panose="020B0604020202020204" pitchFamily="34" charset="0"/>
+              </a:rPr>
+              <a:t>softDelete</a:t>
+            </a:r>
+            <a:r>
+              <a:rPr kumimoji="0" lang="az-Latn-AZ" altLang="en-US" sz="1300" b="0" i="0" u="none" strike="noStrike" cap="none" normalizeH="0" baseline="0">
+                <a:ln>
+                  <a:noFill/>
+                </a:ln>
+                <a:solidFill>
+                  <a:schemeClr val="tx1"/>
+                </a:solidFill>
+                <a:effectLst/>
+                <a:latin typeface="Arial" panose="020B0604020202020204" pitchFamily="34" charset="0"/>
+              </a:rPr>
+              <a:t> haqqında əvvəlki dərslərdən məlumatımız var. </a:t>
+            </a:r>
+          </a:p>
+          <a:p>
+            <a:pPr>
+              <a:lnSpc>
+                <a:spcPct val="150000"/>
+              </a:lnSpc>
+              <a:buNone/>
+            </a:pPr>
+            <a:endParaRPr kumimoji="0" lang="en-US" altLang="en-US" sz="1300" b="0" i="0" u="none" strike="noStrike" cap="none" normalizeH="0" baseline="0">
+              <a:ln>
+                <a:noFill/>
+              </a:ln>
+              <a:solidFill>
+                <a:schemeClr val="tx1"/>
+              </a:solidFill>
+              <a:effectLst/>
+              <a:latin typeface="Arial" panose="020B0604020202020204" pitchFamily="34" charset="0"/>
+            </a:endParaRPr>
+          </a:p>
+        </p:txBody>
+      </p:sp>
+      <p:pic>
+        <p:nvPicPr>
+          <p:cNvPr id="4" name="Picture 3">
+            <a:extLst>
+              <a:ext uri="{FF2B5EF4-FFF2-40B4-BE49-F238E27FC236}">
+                <a16:creationId xmlns:a16="http://schemas.microsoft.com/office/drawing/2014/main" id="{1E9658FC-4E88-FA6D-4DF8-7F58D18816CF}"/>
+              </a:ext>
+            </a:extLst>
+          </p:cNvPr>
+          <p:cNvPicPr>
+            <a:picLocks noChangeAspect="1"/>
+          </p:cNvPicPr>
+          <p:nvPr/>
+        </p:nvPicPr>
+        <p:blipFill>
+          <a:blip r:embed="rId2"/>
+          <a:stretch>
+            <a:fillRect/>
+          </a:stretch>
+        </p:blipFill>
+        <p:spPr>
+          <a:xfrm>
+            <a:off x="6609571" y="1304150"/>
+            <a:ext cx="5582429" cy="5553850"/>
+          </a:xfrm>
+          <a:prstGeom prst="rect">
+            <a:avLst/>
+          </a:prstGeom>
+        </p:spPr>
+      </p:pic>
+    </p:spTree>
+    <p:extLst>
+      <p:ext uri="{BB962C8B-B14F-4D97-AF65-F5344CB8AC3E}">
+        <p14:creationId xmlns:p14="http://schemas.microsoft.com/office/powerpoint/2010/main" val="1719996078"/>
+      </p:ext>
+    </p:extLst>
+  </p:cSld>
+  <p:clrMapOvr>
+    <a:masterClrMapping/>
+  </p:clrMapOvr>
+</p:sld>
+</file>
+
+<file path=ppt/slides/slide6.xml><?xml version="1.0" encoding="utf-8"?>
+<p:sld xmlns:a="http://schemas.openxmlformats.org/drawingml/2006/main" xmlns:r="http://schemas.openxmlformats.org/officeDocument/2006/relationships" xmlns:p="http://schemas.openxmlformats.org/presentationml/2006/main">
+  <p:cSld>
+    <p:spTree>
+      <p:nvGrpSpPr>
+        <p:cNvPr id="1" name="">
+          <a:extLst>
+            <a:ext uri="{FF2B5EF4-FFF2-40B4-BE49-F238E27FC236}">
+              <a16:creationId xmlns:a16="http://schemas.microsoft.com/office/drawing/2014/main" id="{297091D3-40ED-8A6A-20C3-7148FC2A575B}"/>
+            </a:ext>
+          </a:extLst>
+        </p:cNvPr>
+        <p:cNvGrpSpPr/>
+        <p:nvPr/>
+      </p:nvGrpSpPr>
+      <p:grpSpPr>
+        <a:xfrm>
+          <a:off x="0" y="0"/>
+          <a:ext cx="0" cy="0"/>
+          <a:chOff x="0" y="0"/>
+          <a:chExt cx="0" cy="0"/>
+        </a:xfrm>
+      </p:grpSpPr>
+      <p:sp>
+        <p:nvSpPr>
+          <p:cNvPr id="3" name="TextBox 2">
+            <a:extLst>
+              <a:ext uri="{FF2B5EF4-FFF2-40B4-BE49-F238E27FC236}">
+                <a16:creationId xmlns:a16="http://schemas.microsoft.com/office/drawing/2014/main" id="{C3D21C86-D98C-BC44-F280-12433F7FD050}"/>
+              </a:ext>
+            </a:extLst>
+          </p:cNvPr>
+          <p:cNvSpPr txBox="1"/>
+          <p:nvPr/>
+        </p:nvSpPr>
+        <p:spPr>
+          <a:xfrm>
+            <a:off x="217714" y="255046"/>
+            <a:ext cx="11756571" cy="355354"/>
+          </a:xfrm>
+          <a:prstGeom prst="rect">
+            <a:avLst/>
+          </a:prstGeom>
+          <a:noFill/>
+        </p:spPr>
+        <p:txBody>
+          <a:bodyPr wrap="square">
+            <a:spAutoFit/>
+          </a:bodyPr>
+          <a:lstStyle/>
+          <a:p>
+            <a:pPr>
+              <a:lnSpc>
+                <a:spcPct val="150000"/>
+              </a:lnSpc>
+              <a:buNone/>
+            </a:pPr>
+            <a:r>
+              <a:rPr kumimoji="0" lang="en-US" altLang="en-US" sz="1300" b="0" i="0" u="none" strike="noStrike" cap="none" normalizeH="0" baseline="0">
+                <a:ln>
+                  <a:noFill/>
+                </a:ln>
+                <a:solidFill>
+                  <a:schemeClr val="tx1"/>
+                </a:solidFill>
+                <a:effectLst/>
+                <a:latin typeface="Arial" panose="020B0604020202020204" pitchFamily="34" charset="0"/>
+              </a:rPr>
+              <a:t>.</a:t>
+            </a:r>
+          </a:p>
+        </p:txBody>
+      </p:sp>
+    </p:spTree>
+    <p:extLst>
+      <p:ext uri="{BB962C8B-B14F-4D97-AF65-F5344CB8AC3E}">
+        <p14:creationId xmlns:p14="http://schemas.microsoft.com/office/powerpoint/2010/main" val="36083802"/>
       </p:ext>
     </p:extLst>
   </p:cSld>
